--- a/docs/pptx/Ch3_M1M2_FIFO_Queue_Sorting.pptx
+++ b/docs/pptx/Ch3_M1M2_FIFO_Queue_Sorting.pptx
@@ -513,10 +513,19 @@
           <a:lstStyle/>
           <a:p>
             <a:r>
-              <a:rPr lang="en-US" dirty="0"/>
-              <a:t/>
-            </a:r>
-            <a:endParaRPr lang="en-US" dirty="0"/>
+              <a:t>TITRE : Queue FIFO + Algorithmes de Tri</a:t>
+            </a:r>
+          </a:p>
+          <a:p>
+            <a:r>
+              <a:t>Durée : 2h</a:t>
+            </a:r>
+          </a:p>
+          <a:p/>
+          <a:p>
+            <a:r>
+              <a:t>Matériel : site → Monde 1 → Ch3 (simulateur de tri ANIMÉ + course d'algorithmes)</a:t>
+            </a:r>
           </a:p>
         </p:txBody>
       </p:sp>
@@ -953,10 +962,19 @@
           <a:lstStyle/>
           <a:p>
             <a:r>
-              <a:rPr lang="en-US" dirty="0"/>
-              <a:t/>
-            </a:r>
-            <a:endParaRPr lang="en-US" dirty="0"/>
+              <a:t>PROF: PARTIE 1 - Queue FIFO (45 min)</a:t>
+            </a:r>
+          </a:p>
+          <a:p/>
+          <a:p>
+            <a:r>
+              <a:t>Commencer par l'analogie de la file d'attente au supermarché.</a:t>
+            </a:r>
+          </a:p>
+          <a:p>
+            <a:r>
+              <a:t>Le premier arrivé est le premier servi = FIFO.</a:t>
+            </a:r>
           </a:p>
         </p:txBody>
       </p:sp>
@@ -1041,10 +1059,20 @@
           <a:lstStyle/>
           <a:p>
             <a:r>
-              <a:rPr lang="en-US" dirty="0"/>
-              <a:t/>
-            </a:r>
-            <a:endParaRPr lang="en-US" dirty="0"/>
+              <a:t>PROF: Montrer les opérations : enqueue (ajouter en fin) et dequeue (retirer du début).</a:t>
+            </a:r>
+          </a:p>
+          <a:p/>
+          <a:p>
+            <a:r>
+              <a:t>Utiliser le simulateur FIFO sur le site : les étudiants ajoutent et retirent des éléments visuellement.</a:t>
+            </a:r>
+          </a:p>
+          <a:p/>
+          <a:p>
+            <a:r>
+              <a:t>Question : 'Quelle est la différence avec un Stack ?'</a:t>
+            </a:r>
           </a:p>
         </p:txBody>
       </p:sp>
@@ -1129,10 +1157,20 @@
           <a:lstStyle/>
           <a:p>
             <a:r>
-              <a:rPr lang="en-US" dirty="0"/>
-              <a:t/>
-            </a:r>
-            <a:endParaRPr lang="en-US" dirty="0"/>
+              <a:t>PROF: Montrer que Queue peut être implémenté par LinkedList ou ArrayDeque.</a:t>
+            </a:r>
+          </a:p>
+          <a:p/>
+          <a:p>
+            <a:r>
+              <a:t>ArrayDeque est plus rapide en pratique (tableau circulaire, cache-friendly).</a:t>
+            </a:r>
+          </a:p>
+          <a:p/>
+          <a:p>
+            <a:r>
+              <a:t>Exercice : implémenter une file d'attente de clients.</a:t>
+            </a:r>
           </a:p>
         </p:txBody>
       </p:sp>
@@ -1217,10 +1255,25 @@
           <a:lstStyle/>
           <a:p>
             <a:r>
-              <a:rPr lang="en-US" dirty="0"/>
-              <a:t/>
-            </a:r>
-            <a:endParaRPr lang="en-US" dirty="0"/>
+              <a:t>PROF: ArrayDeque utilise un tableau circulaire.</a:t>
+            </a:r>
+          </a:p>
+          <a:p/>
+          <a:p>
+            <a:r>
+              <a:t>head pointe le début, tail pointe la fin.</a:t>
+            </a:r>
+          </a:p>
+          <a:p>
+            <a:r>
+              <a:t>Quand tail atteint la fin du tableau → il revient au début (modulo).</a:t>
+            </a:r>
+          </a:p>
+          <a:p/>
+          <a:p>
+            <a:r>
+              <a:t>Dessiner au tableau le principe du tableau circulaire.</a:t>
+            </a:r>
           </a:p>
         </p:txBody>
       </p:sp>
